--- a/lab-materials/lab04/files/lab04_writing_slides.pptx
+++ b/lab-materials/lab04/files/lab04_writing_slides.pptx
@@ -225,10 +225,7 @@
               <a:buNone/>
               <a:defRPr sz="2000">
                 <a:solidFill>
-                  <a:schemeClr val="tx1">
-                    <a:lumMod val="75000"/>
-                    <a:lumOff val="25000"/>
-                  </a:schemeClr>
+                  <a:srgbClr val="FFFFFF"/>
                 </a:solidFill>
               </a:defRPr>
             </a:lvl1pPr>
